--- a/metro/metro-f10-neighborhood.pptx
+++ b/metro/metro-f10-neighborhood.pptx
@@ -3602,9 +3602,9 @@
                 <a:solidFill>
                   <a:srgbClr val="FFFFFF"/>
                 </a:solidFill>
-                <a:latin typeface="Space Grotesk"/>
-                <a:ea typeface="Space Grotesk"/>
-                <a:cs typeface="Space Grotesk"/>
+                <a:latin typeface="HK Grotesk"/>
+                <a:ea typeface="HK Grotesk"/>
+                <a:cs typeface="HK Grotesk"/>
               </a:rPr>
               <a:t>NO</a:t>
             </a:r>
@@ -3641,9 +3641,9 @@
                 <a:solidFill>
                   <a:srgbClr val="FFFFFF"/>
                 </a:solidFill>
-                <a:latin typeface="Space Grotesk"/>
-                <a:ea typeface="Space Grotesk"/>
-                <a:cs typeface="Space Grotesk"/>
+                <a:latin typeface="HK Grotesk"/>
+                <a:ea typeface="HK Grotesk"/>
+                <a:cs typeface="HK Grotesk"/>
               </a:rPr>
               <a:t>North &amp; Oak</a:t>
             </a:r>
@@ -3785,9 +3785,9 @@
                 <a:solidFill>
                   <a:srgbClr val="FFFFFF"/>
                 </a:solidFill>
-                <a:latin typeface="Space Grotesk"/>
-                <a:ea typeface="Space Grotesk"/>
-                <a:cs typeface="Space Grotesk"/>
+                <a:latin typeface="HK Grotesk"/>
+                <a:ea typeface="HK Grotesk"/>
+                <a:cs typeface="HK Grotesk"/>
               </a:rPr>
               <a:t>Fulton Market.</a:t>
             </a:r>
@@ -3859,9 +3859,9 @@
                 <a:solidFill>
                   <a:srgbClr val="2D5BE3"/>
                 </a:solidFill>
-                <a:latin typeface="Space Grotesk"/>
-                <a:ea typeface="Space Grotesk"/>
-                <a:cs typeface="Space Grotesk"/>
+                <a:latin typeface="HK Grotesk"/>
+                <a:ea typeface="HK Grotesk"/>
+                <a:cs typeface="HK Grotesk"/>
               </a:rPr>
               <a:t>01</a:t>
             </a:r>
@@ -3894,9 +3894,9 @@
                 <a:solidFill>
                   <a:srgbClr val="FFFFFF"/>
                 </a:solidFill>
-                <a:latin typeface="Space Grotesk"/>
-                <a:ea typeface="Space Grotesk"/>
-                <a:cs typeface="Space Grotesk"/>
+                <a:latin typeface="HK Grotesk"/>
+                <a:ea typeface="HK Grotesk"/>
+                <a:cs typeface="HK Grotesk"/>
               </a:rPr>
               <a:t>Dining</a:t>
             </a:r>
@@ -3933,9 +3933,9 @@
                 <a:solidFill>
                   <a:srgbClr val="B8B9BA"/>
                 </a:solidFill>
-                <a:latin typeface="Space Grotesk"/>
-                <a:ea typeface="Space Grotesk"/>
-                <a:cs typeface="Space Grotesk"/>
+                <a:latin typeface="HK Grotesk"/>
+                <a:ea typeface="HK Grotesk"/>
+                <a:cs typeface="HK Grotesk"/>
               </a:rPr>
               <a:t>Avec, The Aviary, and espresso at Sawada around the corner.</a:t>
             </a:r>
@@ -3972,9 +3972,9 @@
                 <a:solidFill>
                   <a:srgbClr val="2D5BE3"/>
                 </a:solidFill>
-                <a:latin typeface="Space Grotesk"/>
-                <a:ea typeface="Space Grotesk"/>
-                <a:cs typeface="Space Grotesk"/>
+                <a:latin typeface="HK Grotesk"/>
+                <a:ea typeface="HK Grotesk"/>
+                <a:cs typeface="HK Grotesk"/>
               </a:rPr>
               <a:t>02</a:t>
             </a:r>
@@ -4007,9 +4007,9 @@
                 <a:solidFill>
                   <a:srgbClr val="FFFFFF"/>
                 </a:solidFill>
-                <a:latin typeface="Space Grotesk"/>
-                <a:ea typeface="Space Grotesk"/>
-                <a:cs typeface="Space Grotesk"/>
+                <a:latin typeface="HK Grotesk"/>
+                <a:ea typeface="HK Grotesk"/>
+                <a:cs typeface="HK Grotesk"/>
               </a:rPr>
               <a:t>Schools</a:t>
             </a:r>
@@ -4046,9 +4046,9 @@
                 <a:solidFill>
                   <a:srgbClr val="B8B9BA"/>
                 </a:solidFill>
-                <a:latin typeface="Space Grotesk"/>
-                <a:ea typeface="Space Grotesk"/>
-                <a:cs typeface="Space Grotesk"/>
+                <a:latin typeface="HK Grotesk"/>
+                <a:ea typeface="HK Grotesk"/>
+                <a:cs typeface="HK Grotesk"/>
               </a:rPr>
               <a:t>Skinner West and British International — top rated, minutes away.</a:t>
             </a:r>
@@ -4085,9 +4085,9 @@
                 <a:solidFill>
                   <a:srgbClr val="2D5BE3"/>
                 </a:solidFill>
-                <a:latin typeface="Space Grotesk"/>
-                <a:ea typeface="Space Grotesk"/>
-                <a:cs typeface="Space Grotesk"/>
+                <a:latin typeface="HK Grotesk"/>
+                <a:ea typeface="HK Grotesk"/>
+                <a:cs typeface="HK Grotesk"/>
               </a:rPr>
               <a:t>03</a:t>
             </a:r>
@@ -4120,9 +4120,9 @@
                 <a:solidFill>
                   <a:srgbClr val="FFFFFF"/>
                 </a:solidFill>
-                <a:latin typeface="Space Grotesk"/>
-                <a:ea typeface="Space Grotesk"/>
-                <a:cs typeface="Space Grotesk"/>
+                <a:latin typeface="HK Grotesk"/>
+                <a:ea typeface="HK Grotesk"/>
+                <a:cs typeface="HK Grotesk"/>
               </a:rPr>
               <a:t>Outdoors</a:t>
             </a:r>
@@ -4159,9 +4159,9 @@
                 <a:solidFill>
                   <a:srgbClr val="B8B9BA"/>
                 </a:solidFill>
-                <a:latin typeface="Space Grotesk"/>
-                <a:ea typeface="Space Grotesk"/>
-                <a:cs typeface="Space Grotesk"/>
+                <a:latin typeface="HK Grotesk"/>
+                <a:ea typeface="HK Grotesk"/>
+                <a:cs typeface="HK Grotesk"/>
               </a:rPr>
               <a:t>The Riverwalk and the 606 trail, a five-minute walk from the lobby.</a:t>
             </a:r>
